--- a/chapter-06/FIN1209-Chapter-06-Student-Edition.pptx
+++ b/chapter-06/FIN1209-Chapter-06-Student-Edition.pptx
@@ -4714,7 +4714,7 @@
                 </a:solidFill>
                 <a:latin typeface="Arial"/>
               </a:rPr>
-              <a:t>Book p.175 defines both. The chart is ours: arrows, not prices.</a:t>
+              <a:t>Book p.175 defines both. The chart is ours: sketches, not prices.</a:t>
             </a:r>
           </a:p>
         </p:txBody>
@@ -7440,7 +7440,7 @@
               </a:spcAft>
             </a:pPr>
             <a:r>
-              <a:rPr sz="1900" b="0" i="0">
+              <a:rPr sz="1700" b="0" i="0">
                 <a:solidFill>
                   <a:srgbClr val="1A1A1A"/>
                 </a:solidFill>
@@ -7462,13 +7462,13 @@
               </a:spcAft>
             </a:pPr>
             <a:r>
-              <a:rPr sz="1900" b="0" i="0">
+              <a:rPr sz="1700" b="0" i="0">
                 <a:solidFill>
                   <a:srgbClr val="1A1A1A"/>
                 </a:solidFill>
                 <a:latin typeface="Arial"/>
               </a:rPr>
-              <a:t>2, 8 and 10: volume declines in a consolidation, timing the breakout.</a:t>
+              <a:t>2, 8 and 10: volume declines in a consolidation, timing the breakout (why: Part 2).</a:t>
             </a:r>
           </a:p>
         </p:txBody>
@@ -7481,8 +7481,8 @@
         </p:nvSpPr>
         <p:spPr>
           <a:xfrm>
-            <a:off x="777240" y="4016502"/>
-            <a:ext cx="82296" cy="1060704"/>
+            <a:off x="777240" y="3856482"/>
+            <a:ext cx="82296" cy="969263"/>
           </a:xfrm>
           <a:prstGeom prst="rect">
             <a:avLst/>
@@ -7511,8 +7511,8 @@
         </p:nvSpPr>
         <p:spPr>
           <a:xfrm>
-            <a:off x="1069848" y="4053078"/>
-            <a:ext cx="4645152" cy="1060704"/>
+            <a:off x="1069848" y="3893058"/>
+            <a:ext cx="4645152" cy="969263"/>
           </a:xfrm>
           <a:prstGeom prst="rect">
             <a:avLst/>
@@ -7537,7 +7537,7 @@
               </a:spcAft>
             </a:pPr>
             <a:r>
-              <a:rPr sz="2000" b="1" i="0">
+              <a:rPr sz="1800" b="1" i="0">
                 <a:solidFill>
                   <a:srgbClr val="1A1A1A"/>
                 </a:solidFill>
@@ -7556,7 +7556,7 @@
         </p:nvSpPr>
         <p:spPr>
           <a:xfrm>
-            <a:off x="777240" y="5278374"/>
+            <a:off x="777240" y="5026914"/>
             <a:ext cx="4937760" cy="731520"/>
           </a:xfrm>
           <a:prstGeom prst="rect">
@@ -7588,7 +7588,7 @@
                 </a:solidFill>
                 <a:latin typeface="Arial"/>
               </a:rPr>
-              <a:t>The book says bullish divergence occurs only in a downtrend; 4 and 6 are dips in this uptrend. Our reading: price falling, for any stretch.</a:t>
+              <a:t>The book says bullish divergence occurs only in a downtrend; 4 and 6 are dips in this uptrend. Our reading, price falling for any stretch: no check rests on it.</a:t>
             </a:r>
           </a:p>
         </p:txBody>
@@ -8152,7 +8152,7 @@
         <p:spPr>
           <a:xfrm>
             <a:off x="777240" y="4729734"/>
-            <a:ext cx="82296" cy="694944"/>
+            <a:ext cx="82296" cy="969263"/>
           </a:xfrm>
           <a:prstGeom prst="rect">
             <a:avLst/>
@@ -8182,7 +8182,7 @@
         <p:spPr>
           <a:xfrm>
             <a:off x="1069848" y="4766310"/>
-            <a:ext cx="4828032" cy="694944"/>
+            <a:ext cx="4828032" cy="969263"/>
           </a:xfrm>
           <a:prstGeom prst="rect">
             <a:avLst/>
@@ -8213,7 +8213,7 @@
                 </a:solidFill>
                 <a:latin typeface="Arial"/>
               </a:rPr>
-              <a:t>Every period here is bullish volume: price and volume move together.</a:t>
+              <a:t>1, 2 and 4 are bullish volume. In 3 price moves sideways: no reading, Part 2.</a:t>
             </a:r>
           </a:p>
         </p:txBody>
@@ -20125,7 +20125,7 @@
                 </a:solidFill>
                 <a:latin typeface="Arial"/>
               </a:rPr>
-              <a:t>Figure 6.16: Apple turns at nine time lines, each where volume tests a lower volume threshold, circled. Some are tops and some are bottoms.</a:t>
+              <a:t>Figure 6.16: Apple turns at seven time lines, each where volume tests a lower volume threshold, circled. Some are tops and some are bottoms.</a:t>
             </a:r>
           </a:p>
         </p:txBody>
@@ -25957,13 +25957,13 @@
               </a:spcAft>
             </a:pPr>
             <a:r>
-              <a:rPr sz="1700" b="0" i="0">
+              <a:rPr sz="1800" b="0" i="0">
                 <a:solidFill>
                   <a:srgbClr val="1A1A1A"/>
                 </a:solidFill>
                 <a:latin typeface="Arial"/>
               </a:rPr>
-              <a:t>The lookback period: a simple backtest may be needed to find the filtering right for a setup.</a:t>
+              <a:t>The lookback period: a simple backtest may be needed to find the right filtering.</a:t>
             </a:r>
           </a:p>
           <a:p>
@@ -25979,13 +25979,13 @@
               </a:spcAft>
             </a:pPr>
             <a:r>
-              <a:rPr sz="1700" b="0" i="0">
+              <a:rPr sz="1800" b="0" i="0">
                 <a:solidFill>
                   <a:srgbClr val="1A1A1A"/>
                 </a:solidFill>
                 <a:latin typeface="Arial"/>
               </a:rPr>
-              <a:t>Some set it to the dominant trading cycle period, or one half of it.</a:t>
+              <a:t>Some set it to the dominant trading cycle period, or half of it.</a:t>
             </a:r>
           </a:p>
           <a:p>
@@ -26001,13 +26001,13 @@
               </a:spcAft>
             </a:pPr>
             <a:r>
-              <a:rPr sz="1700" b="0" i="0">
+              <a:rPr sz="1800" b="0" i="0">
                 <a:solidFill>
                   <a:srgbClr val="1A1A1A"/>
                 </a:solidFill>
                 <a:latin typeface="Arial"/>
               </a:rPr>
-              <a:t>Figure 6.20: spikes above the smoothed volume line on USDJPY, each at a top or a bottom.</a:t>
+              <a:t>Figure 6.20: spikes above the smoothed volume line, each at a top or a bottom.</a:t>
             </a:r>
           </a:p>
         </p:txBody>
@@ -26020,8 +26020,8 @@
         </p:nvSpPr>
         <p:spPr>
           <a:xfrm>
-            <a:off x="777240" y="4565142"/>
-            <a:ext cx="82296" cy="694944"/>
+            <a:off x="777240" y="4389120"/>
+            <a:ext cx="82296" cy="725424"/>
           </a:xfrm>
           <a:prstGeom prst="rect">
             <a:avLst/>
@@ -26050,8 +26050,8 @@
         </p:nvSpPr>
         <p:spPr>
           <a:xfrm>
-            <a:off x="1069848" y="4601718"/>
-            <a:ext cx="4645152" cy="694944"/>
+            <a:off x="1069848" y="4425696"/>
+            <a:ext cx="4645152" cy="725424"/>
           </a:xfrm>
           <a:prstGeom prst="rect">
             <a:avLst/>
@@ -26076,13 +26076,13 @@
               </a:spcAft>
             </a:pPr>
             <a:r>
-              <a:rPr sz="1800" b="1" i="0">
+              <a:rPr sz="1900" b="1" i="0">
                 <a:solidFill>
                   <a:srgbClr val="1A1A1A"/>
                 </a:solidFill>
                 <a:latin typeface="Arial"/>
               </a:rPr>
-              <a:t>The book leaves the length to testing or to the cycle: it gives no number.</a:t>
+              <a:t>The book gives no number for the length.</a:t>
             </a:r>
           </a:p>
         </p:txBody>
@@ -26095,7 +26095,7 @@
         </p:nvSpPr>
         <p:spPr>
           <a:xfrm>
-            <a:off x="777240" y="5461254"/>
+            <a:off x="777240" y="5315712"/>
             <a:ext cx="4937760" cy="731520"/>
           </a:xfrm>
           <a:prstGeom prst="rect">
@@ -26127,7 +26127,7 @@
                 </a:solidFill>
                 <a:latin typeface="Arial"/>
               </a:rPr>
-              <a:t>Backtest, Chapter 5: run the method against past prices. Cycle period, Chapter 5: how long each swing takes.</a:t>
+              <a:t>Backtest: run a method on past prices. Cycle period: how long a swing takes. Both Chapter 5. Dominant: undefined; our reading, the cycle most visible on the chart.</a:t>
             </a:r>
           </a:p>
         </p:txBody>
@@ -27052,7 +27052,7 @@
                 </a:solidFill>
                 <a:latin typeface="Arial"/>
               </a:rPr>
-              <a:t>Book p.189. Standard deviation, Chapter 5: how far values typically spread from their average. Bollinger Bands: named in Chapter 5, unexplained. Chart: ours, computed.</a:t>
+              <a:t>Book p.189. Standard deviation, Chapter 5: how far values typically spread from their average. Bollinger Bands: named in Chapter 1, unexplained. Chart: ours, computed.</a:t>
             </a:r>
           </a:p>
         </p:txBody>
@@ -27414,7 +27414,7 @@
                 </a:solidFill>
                 <a:latin typeface="Arial"/>
               </a:rPr>
-              <a:t>Fewer signals than the smoothed filter, at bigger turns.</a:t>
+              <a:t>The book prefers the band: volume can be seen crossing it.</a:t>
             </a:r>
           </a:p>
         </p:txBody>
@@ -32491,7 +32491,7 @@
                 </a:solidFill>
                 <a:latin typeface="Arial"/>
               </a:rPr>
-              <a:t>Book p.191. The two shares, their volumes and their shares outstanding are ours: a peso example of turnover.</a:t>
+              <a:t>Book p.191. The two shares, their volumes and their shares outstanding are ours: a share-count example of turnover.</a:t>
             </a:r>
           </a:p>
         </p:txBody>
@@ -37466,7 +37466,7 @@
         <p:spPr>
           <a:xfrm>
             <a:off x="777240" y="1965960"/>
-            <a:ext cx="6217920" cy="3108960"/>
+            <a:ext cx="6583680" cy="3108960"/>
           </a:xfrm>
           <a:prstGeom prst="rect">
             <a:avLst/>
@@ -37497,7 +37497,7 @@
                 </a:solidFill>
                 <a:latin typeface="Arial"/>
               </a:rPr>
-              <a:t>Short term: a rising, not overbought tick with a falling, not oversold TRIN is bullish; the converse bearish.</a:t>
+              <a:t>Short term: a rising, not overbought tick with a falling, not oversold TRIN: bullish; the converse bearish.</a:t>
             </a:r>
           </a:p>
           <a:p>
@@ -37585,7 +37585,7 @@
         <p:spPr>
           <a:xfrm>
             <a:off x="1069848" y="4601718"/>
-            <a:ext cx="5925312" cy="694944"/>
+            <a:ext cx="6291072" cy="694944"/>
           </a:xfrm>
           <a:prstGeom prst="rect">
             <a:avLst/>
@@ -37630,7 +37630,7 @@
         <p:spPr>
           <a:xfrm>
             <a:off x="777240" y="5461254"/>
-            <a:ext cx="6217920" cy="731520"/>
+            <a:ext cx="6583680" cy="731520"/>
           </a:xfrm>
           <a:prstGeom prst="rect">
             <a:avLst/>
@@ -37661,7 +37661,7 @@
                 </a:solidFill>
                 <a:latin typeface="Arial"/>
               </a:rPr>
-              <a:t>This tick is an indicator the book does not explain; it is not shown to be tick volume.</a:t>
+              <a:t>The book gives these rules no reasons, does not say how to read one value such as 2.0, and never says what this tick measures. No check rests on them.</a:t>
             </a:r>
           </a:p>
         </p:txBody>
@@ -37674,8 +37674,8 @@
         </p:nvSpPr>
         <p:spPr>
           <a:xfrm>
-            <a:off x="7315199" y="1810512"/>
-            <a:ext cx="4099255" cy="3749039"/>
+            <a:off x="7680960" y="1810512"/>
+            <a:ext cx="3733494" cy="3749039"/>
           </a:xfrm>
           <a:prstGeom prst="rect">
             <a:avLst/>
@@ -37706,8 +37706,8 @@
         </p:nvSpPr>
         <p:spPr>
           <a:xfrm>
-            <a:off x="7315199" y="1810512"/>
-            <a:ext cx="4099255" cy="50800"/>
+            <a:off x="7680960" y="1810512"/>
+            <a:ext cx="3733494" cy="50800"/>
           </a:xfrm>
           <a:prstGeom prst="rect">
             <a:avLst/>
@@ -37736,8 +37736,8 @@
         </p:nvSpPr>
         <p:spPr>
           <a:xfrm>
-            <a:off x="7726679" y="2267712"/>
-            <a:ext cx="3276295" cy="3017520"/>
+            <a:off x="8092440" y="2267712"/>
+            <a:ext cx="2910534" cy="3017520"/>
           </a:xfrm>
           <a:prstGeom prst="rect">
             <a:avLst/>
@@ -37825,8 +37825,8 @@
         </p:nvSpPr>
         <p:spPr>
           <a:xfrm>
-            <a:off x="7315199" y="5650992"/>
-            <a:ext cx="4099255" cy="274320"/>
+            <a:off x="7680960" y="5650992"/>
+            <a:ext cx="3733494" cy="274320"/>
           </a:xfrm>
           <a:prstGeom prst="rect">
             <a:avLst/>
@@ -38287,7 +38287,7 @@
                 </a:solidFill>
                 <a:latin typeface="Arial"/>
               </a:rPr>
-              <a:t>The figure adds what the text does not: balanced tick action, read as a potential consolidation.</a:t>
+              <a:t>The figure's other tick labels, such as balanced tick action, are not explained by the book.</a:t>
             </a:r>
           </a:p>
         </p:txBody>
@@ -38969,7 +38969,7 @@
                 </a:solidFill>
                 <a:latin typeface="Arial"/>
               </a:rPr>
-              <a:t>In three months: 9 million shares at PHP 48 to 50, 2 million at PHP 54 to 56. The longest sideways bar: PHP 48 to 50.</a:t>
+              <a:t>Our chart, 100 days: 68 million shares at PHP 48 to 50, 12 million at PHP 54 to 56. The longest sideways bar: PHP 48 to 50.</a:t>
             </a:r>
           </a:p>
         </p:txBody>
@@ -39597,7 +39597,7 @@
                 </a:solidFill>
                 <a:latin typeface="Arial"/>
               </a:rPr>
-              <a:t>Chapter 4 called this price-based volume. It is not Part 1's price-based volume oscillators, which build price into a line.</a:t>
+              <a:t>Chapter 4 called this price-based volume; it is not Part 1's price-based oscillators. The figure's top panel is an oscillator the book does not discuss.</a:t>
             </a:r>
           </a:p>
         </p:txBody>
@@ -40075,7 +40075,7 @@
               </a:spcAft>
             </a:pPr>
             <a:r>
-              <a:rPr sz="2000" b="0" i="0">
+              <a:rPr sz="1900" b="0" i="0">
                 <a:solidFill>
                   <a:srgbClr val="1A1A1A"/>
                 </a:solidFill>
@@ -40097,7 +40097,7 @@
               </a:spcAft>
             </a:pPr>
             <a:r>
-              <a:rPr sz="2000" b="0" i="0">
+              <a:rPr sz="1900" b="0" i="0">
                 <a:solidFill>
                   <a:srgbClr val="1A1A1A"/>
                 </a:solidFill>
@@ -40116,8 +40116,8 @@
         </p:nvSpPr>
         <p:spPr>
           <a:xfrm>
-            <a:off x="777240" y="4096511"/>
-            <a:ext cx="82296" cy="1106423"/>
+            <a:off x="777240" y="3712463"/>
+            <a:ext cx="82296" cy="1060704"/>
           </a:xfrm>
           <a:prstGeom prst="rect">
             <a:avLst/>
@@ -40146,8 +40146,8 @@
         </p:nvSpPr>
         <p:spPr>
           <a:xfrm>
-            <a:off x="1069848" y="4133087"/>
-            <a:ext cx="4645152" cy="1106423"/>
+            <a:off x="1069848" y="3749039"/>
+            <a:ext cx="4645152" cy="1060704"/>
           </a:xfrm>
           <a:prstGeom prst="rect">
             <a:avLst/>
@@ -40172,7 +40172,7 @@
               </a:spcAft>
             </a:pPr>
             <a:r>
-              <a:rPr sz="2100" b="1" i="0">
+              <a:rPr sz="2000" b="1" i="0">
                 <a:solidFill>
                   <a:srgbClr val="1A1A1A"/>
                 </a:solidFill>
@@ -40185,7 +40185,52 @@
       </p:sp>
       <p:sp>
         <p:nvSpPr>
-          <p:cNvPr id="10" name="Rectangle 9"/>
+          <p:cNvPr id="10" name="TextBox 9"/>
+          <p:cNvSpPr txBox="1"/>
+          <p:nvPr/>
+        </p:nvSpPr>
+        <p:spPr>
+          <a:xfrm>
+            <a:off x="777240" y="4974336"/>
+            <a:ext cx="4937760" cy="731520"/>
+          </a:xfrm>
+          <a:prstGeom prst="rect">
+            <a:avLst/>
+          </a:prstGeom>
+          <a:noFill/>
+        </p:spPr>
+        <p:txBody>
+          <a:bodyPr wrap="square" anchor="t" lIns="0" rIns="0" tIns="0" bIns="0">
+            <a:spAutoFit/>
+          </a:bodyPr>
+          <a:lstStyle/>
+          <a:p>
+            <a:pPr algn="l">
+              <a:lnSpc>
+                <a:spcPct val="100000"/>
+              </a:lnSpc>
+              <a:spcBef>
+                <a:spcPts val="0"/>
+              </a:spcBef>
+              <a:spcAft>
+                <a:spcPts val="0"/>
+              </a:spcAft>
+            </a:pPr>
+            <a:r>
+              <a:rPr sz="1300" b="0" i="1">
+                <a:solidFill>
+                  <a:srgbClr val="818181"/>
+                </a:solidFill>
+                <a:latin typeface="Arial"/>
+              </a:rPr>
+              <a:t>The figure also marks bearish confirmation, price falling on rising volume, and bearish divergence, price rising on falling volume: Part 1's names.</a:t>
+            </a:r>
+          </a:p>
+        </p:txBody>
+      </p:sp>
+      <p:sp>
+        <p:nvSpPr>
+          <p:cNvPr id="11" name="Rectangle 10"/>
           <p:cNvSpPr/>
           <p:nvPr/>
         </p:nvSpPr>
@@ -40217,7 +40262,7 @@
       </p:sp>
       <p:sp>
         <p:nvSpPr>
-          <p:cNvPr id="11" name="Rectangle 10"/>
+          <p:cNvPr id="12" name="Rectangle 11"/>
           <p:cNvSpPr/>
           <p:nvPr/>
         </p:nvSpPr>
@@ -40247,7 +40292,7 @@
       </p:sp>
       <p:sp>
         <p:nvSpPr>
-          <p:cNvPr id="12" name="TextBox 11"/>
+          <p:cNvPr id="13" name="TextBox 12"/>
           <p:cNvSpPr txBox="1"/>
           <p:nvPr/>
         </p:nvSpPr>
@@ -40336,7 +40381,7 @@
       </p:sp>
       <p:sp>
         <p:nvSpPr>
-          <p:cNvPr id="13" name="TextBox 12"/>
+          <p:cNvPr id="14" name="TextBox 13"/>
           <p:cNvSpPr txBox="1"/>
           <p:nvPr/>
         </p:nvSpPr>
@@ -40381,7 +40426,7 @@
       </p:sp>
       <p:sp>
         <p:nvSpPr>
-          <p:cNvPr id="14" name="TextBox 13"/>
+          <p:cNvPr id="15" name="TextBox 14"/>
           <p:cNvSpPr txBox="1"/>
           <p:nvPr/>
         </p:nvSpPr>
@@ -41789,7 +41834,7 @@
               </a:spcAft>
             </a:pPr>
             <a:r>
-              <a:rPr sz="2000" b="0" i="0">
+              <a:rPr sz="1900" b="0" i="0">
                 <a:solidFill>
                   <a:srgbClr val="1A1A1A"/>
                 </a:solidFill>
@@ -41811,7 +41856,7 @@
               </a:spcAft>
             </a:pPr>
             <a:r>
-              <a:rPr sz="2000" b="0" i="0">
+              <a:rPr sz="1900" b="0" i="0">
                 <a:solidFill>
                   <a:srgbClr val="1A1A1A"/>
                 </a:solidFill>
@@ -41833,7 +41878,7 @@
               </a:spcAft>
             </a:pPr>
             <a:r>
-              <a:rPr sz="2000" b="0" i="0">
+              <a:rPr sz="1900" b="0" i="0">
                 <a:solidFill>
                   <a:srgbClr val="1A1A1A"/>
                 </a:solidFill>
@@ -41852,8 +41897,8 @@
         </p:nvSpPr>
         <p:spPr>
           <a:xfrm>
-            <a:off x="777240" y="4581144"/>
-            <a:ext cx="82296" cy="786384"/>
+            <a:off x="777240" y="4485132"/>
+            <a:ext cx="82296" cy="755904"/>
           </a:xfrm>
           <a:prstGeom prst="rect">
             <a:avLst/>
@@ -41882,8 +41927,8 @@
         </p:nvSpPr>
         <p:spPr>
           <a:xfrm>
-            <a:off x="1069848" y="4617720"/>
-            <a:ext cx="6108192" cy="786384"/>
+            <a:off x="1069848" y="4521708"/>
+            <a:ext cx="6108192" cy="755904"/>
           </a:xfrm>
           <a:prstGeom prst="rect">
             <a:avLst/>
@@ -41908,20 +41953,65 @@
               </a:spcAft>
             </a:pPr>
             <a:r>
-              <a:rPr sz="2100" b="1" i="0">
+              <a:rPr sz="2000" b="1" i="0">
                 <a:solidFill>
                   <a:srgbClr val="1A1A1A"/>
                 </a:solidFill>
                 <a:latin typeface="Arial"/>
               </a:rPr>
-              <a:t>The same four cases. Chapter 6 names them, and reads two of them more strongly.</a:t>
-            </a:r>
-          </a:p>
-        </p:txBody>
-      </p:sp>
-      <p:sp>
-        <p:nvSpPr>
-          <p:cNvPr id="10" name="Rectangle 9"/>
+              <a:t>Chapter 5's squat bar is the High Volume Reversal Bar.</a:t>
+            </a:r>
+          </a:p>
+        </p:txBody>
+      </p:sp>
+      <p:sp>
+        <p:nvSpPr>
+          <p:cNvPr id="10" name="TextBox 9"/>
+          <p:cNvSpPr txBox="1"/>
+          <p:nvPr/>
+        </p:nvSpPr>
+        <p:spPr>
+          <a:xfrm>
+            <a:off x="777240" y="5442204"/>
+            <a:ext cx="6400800" cy="731520"/>
+          </a:xfrm>
+          <a:prstGeom prst="rect">
+            <a:avLst/>
+          </a:prstGeom>
+          <a:noFill/>
+        </p:spPr>
+        <p:txBody>
+          <a:bodyPr wrap="square" anchor="t" lIns="0" rIns="0" tIns="0" bIns="0">
+            <a:spAutoFit/>
+          </a:bodyPr>
+          <a:lstStyle/>
+          <a:p>
+            <a:pPr algn="l">
+              <a:lnSpc>
+                <a:spcPct val="100000"/>
+              </a:lnSpc>
+              <a:spcBef>
+                <a:spcPts val="0"/>
+              </a:spcBef>
+              <a:spcAft>
+                <a:spcPts val="0"/>
+              </a:spcAft>
+            </a:pPr>
+            <a:r>
+              <a:rPr sz="1300" b="0" i="1">
+                <a:solidFill>
+                  <a:srgbClr val="818181"/>
+                </a:solidFill>
+                <a:latin typeface="Arial"/>
+              </a:rPr>
+              <a:t>Chapter 6 reads two cases more strongly: both reversal bars. Chapter 5 called the large range on low volume only trend inhibiting.</a:t>
+            </a:r>
+          </a:p>
+        </p:txBody>
+      </p:sp>
+      <p:sp>
+        <p:nvSpPr>
+          <p:cNvPr id="11" name="Rectangle 10"/>
           <p:cNvSpPr/>
           <p:nvPr/>
         </p:nvSpPr>
@@ -41953,7 +42043,7 @@
       </p:sp>
       <p:sp>
         <p:nvSpPr>
-          <p:cNvPr id="11" name="Rectangle 10"/>
+          <p:cNvPr id="12" name="Rectangle 11"/>
           <p:cNvSpPr/>
           <p:nvPr/>
         </p:nvSpPr>
@@ -41983,7 +42073,7 @@
       </p:sp>
       <p:sp>
         <p:nvSpPr>
-          <p:cNvPr id="12" name="TextBox 11"/>
+          <p:cNvPr id="13" name="TextBox 12"/>
           <p:cNvSpPr txBox="1"/>
           <p:nvPr/>
         </p:nvSpPr>
@@ -42072,7 +42162,7 @@
       </p:sp>
       <p:sp>
         <p:nvSpPr>
-          <p:cNvPr id="13" name="TextBox 12"/>
+          <p:cNvPr id="14" name="TextBox 13"/>
           <p:cNvSpPr txBox="1"/>
           <p:nvPr/>
         </p:nvSpPr>
@@ -42117,7 +42207,7 @@
       </p:sp>
       <p:sp>
         <p:nvSpPr>
-          <p:cNvPr id="14" name="TextBox 13"/>
+          <p:cNvPr id="15" name="TextBox 14"/>
           <p:cNvSpPr txBox="1"/>
           <p:nvPr/>
         </p:nvSpPr>
@@ -44093,7 +44183,7 @@
               </a:spcAft>
             </a:pPr>
             <a:r>
-              <a:rPr sz="1800" b="0" i="0">
+              <a:rPr sz="1700" b="0" i="0">
                 <a:solidFill>
                   <a:srgbClr val="1A1A1A"/>
                 </a:solidFill>
@@ -44115,7 +44205,7 @@
               </a:spcAft>
             </a:pPr>
             <a:r>
-              <a:rPr sz="1800" b="0" i="0">
+              <a:rPr sz="1700" b="0" i="0">
                 <a:solidFill>
                   <a:srgbClr val="1A1A1A"/>
                 </a:solidFill>
@@ -44134,8 +44224,8 @@
         </p:nvSpPr>
         <p:spPr>
           <a:xfrm>
-            <a:off x="777240" y="4512564"/>
-            <a:ext cx="82296" cy="725424"/>
+            <a:off x="777240" y="4128516"/>
+            <a:ext cx="82296" cy="969263"/>
           </a:xfrm>
           <a:prstGeom prst="rect">
             <a:avLst/>
@@ -44164,8 +44254,8 @@
         </p:nvSpPr>
         <p:spPr>
           <a:xfrm>
-            <a:off x="1069848" y="4549140"/>
-            <a:ext cx="4828032" cy="725424"/>
+            <a:off x="1069848" y="4165092"/>
+            <a:ext cx="4828032" cy="969263"/>
           </a:xfrm>
           <a:prstGeom prst="rect">
             <a:avLst/>
@@ -44190,13 +44280,13 @@
               </a:spcAft>
             </a:pPr>
             <a:r>
-              <a:rPr sz="1900" b="1" i="0">
+              <a:rPr sz="1800" b="1" i="0">
                 <a:solidFill>
                   <a:srgbClr val="1A1A1A"/>
                 </a:solidFill>
                 <a:latin typeface="Arial"/>
               </a:rPr>
-              <a:t>The rest bar depends on its trend; the continuation bar does not.</a:t>
+              <a:t>The rest bar's meaning depends on the trend's speed; the continuation bar continues whichever trend it is in.</a:t>
             </a:r>
           </a:p>
         </p:txBody>
@@ -44209,7 +44299,7 @@
         </p:nvSpPr>
         <p:spPr>
           <a:xfrm>
-            <a:off x="777240" y="5439156"/>
+            <a:off x="777240" y="5298948"/>
             <a:ext cx="5120640" cy="731520"/>
           </a:xfrm>
           <a:prstGeom prst="rect">
@@ -44652,7 +44742,7 @@
                 </a:solidFill>
                 <a:latin typeface="Arial"/>
               </a:rPr>
-              <a:t>After each, price reverses rapidly in the opposite direction.</a:t>
+              <a:t>After each, price reverses rapidly.</a:t>
             </a:r>
           </a:p>
           <a:p>
@@ -44674,7 +44764,7 @@
                 </a:solidFill>
                 <a:latin typeface="Arial"/>
               </a:rPr>
-              <a:t>Also: a low volume breakout signal near the apex of a descending triangle in August, then a large volume surge on the breakout.</a:t>
+              <a:t>Also: in August a low volume breakout signal at a descending triangle's apex, then a volume surge.</a:t>
             </a:r>
           </a:p>
         </p:txBody>
@@ -44687,7 +44777,7 @@
         </p:nvSpPr>
         <p:spPr>
           <a:xfrm>
-            <a:off x="777240" y="4677156"/>
+            <a:off x="777240" y="4389120"/>
             <a:ext cx="82296" cy="725424"/>
           </a:xfrm>
           <a:prstGeom prst="rect">
@@ -44717,7 +44807,7 @@
         </p:nvSpPr>
         <p:spPr>
           <a:xfrm>
-            <a:off x="1069848" y="4713732"/>
+            <a:off x="1069848" y="4425696"/>
             <a:ext cx="4645152" cy="725424"/>
           </a:xfrm>
           <a:prstGeom prst="rect">
@@ -44762,7 +44852,7 @@
         </p:nvSpPr>
         <p:spPr>
           <a:xfrm>
-            <a:off x="777240" y="5603748"/>
+            <a:off x="777240" y="5315712"/>
             <a:ext cx="4937760" cy="731520"/>
           </a:xfrm>
           <a:prstGeom prst="rect">
@@ -44794,7 +44884,7 @@
                 </a:solidFill>
                 <a:latin typeface="Arial"/>
               </a:rPr>
-              <a:t>The apex is where the triangle's two lines meet.</a:t>
+              <a:t>Apex: where the triangle's lines meet. The curved lines are Bollinger Bands, not discussed. After Point 2 the reversal runs past the chart's edge.</a:t>
             </a:r>
           </a:p>
         </p:txBody>
@@ -46219,7 +46309,7 @@
                 </a:solidFill>
                 <a:latin typeface="Arial"/>
               </a:rPr>
-              <a:t>Book p.199 and Figure 6.33. The MACD is used here and not taught; Chapter 4 met it.</a:t>
+              <a:t>Book p.199 and Figure 6.33. The MACD is used here and not taught; Chapter 4 met it. The figure's RSI panel and two moving averages are not discussed.</a:t>
             </a:r>
           </a:p>
         </p:txBody>
@@ -47065,7 +47155,7 @@
                 </a:solidFill>
                 <a:latin typeface="Arial"/>
               </a:rPr>
-              <a:t>Volume is fixed for each bar, so a reversal bar is found from its range alone and its height against the rest.</a:t>
+              <a:t>Volume is fixed per bar, so a reversal bar is found from its range and height alone.</a:t>
             </a:r>
           </a:p>
           <a:p>
@@ -47087,7 +47177,7 @@
                 </a:solidFill>
                 <a:latin typeface="Arial"/>
               </a:rPr>
-              <a:t>Figure 6.35: a narrow range bar, bearish, sellers taking control; a wider bar, a lack of interest in the rise.</a:t>
+              <a:t>Figure 6.35: a narrow bar, bearish, sellers in control; a tall bar, no interest in the rise.</a:t>
             </a:r>
           </a:p>
         </p:txBody>
@@ -47100,7 +47190,7 @@
         </p:nvSpPr>
         <p:spPr>
           <a:xfrm>
-            <a:off x="777240" y="4965192"/>
+            <a:off x="777240" y="4389120"/>
             <a:ext cx="82296" cy="725424"/>
           </a:xfrm>
           <a:prstGeom prst="rect">
@@ -47130,7 +47220,7 @@
         </p:nvSpPr>
         <p:spPr>
           <a:xfrm>
-            <a:off x="1069848" y="5001768"/>
+            <a:off x="1069848" y="4425696"/>
             <a:ext cx="5010912" cy="725424"/>
           </a:xfrm>
           <a:prstGeom prst="rect">
@@ -47162,14 +47252,59 @@
                 </a:solidFill>
                 <a:latin typeface="Arial"/>
               </a:rPr>
-              <a:t>Especially useful for pinpointing reversal bars on high or low volume.</a:t>
-            </a:r>
-          </a:p>
-        </p:txBody>
-      </p:sp>
-      <p:sp>
-        <p:nvSpPr>
-          <p:cNvPr id="10" name="Rectangle 9"/>
+              <a:t>Especially useful for reversal bars on high or low volume.</a:t>
+            </a:r>
+          </a:p>
+        </p:txBody>
+      </p:sp>
+      <p:sp>
+        <p:nvSpPr>
+          <p:cNvPr id="10" name="TextBox 9"/>
+          <p:cNvSpPr txBox="1"/>
+          <p:nvPr/>
+        </p:nvSpPr>
+        <p:spPr>
+          <a:xfrm>
+            <a:off x="777240" y="5315712"/>
+            <a:ext cx="5303520" cy="731520"/>
+          </a:xfrm>
+          <a:prstGeom prst="rect">
+            <a:avLst/>
+          </a:prstGeom>
+          <a:noFill/>
+        </p:spPr>
+        <p:txBody>
+          <a:bodyPr wrap="square" anchor="t" lIns="0" rIns="0" tIns="0" bIns="0">
+            <a:spAutoFit/>
+          </a:bodyPr>
+          <a:lstStyle/>
+          <a:p>
+            <a:pPr algn="l">
+              <a:lnSpc>
+                <a:spcPct val="100000"/>
+              </a:lnSpc>
+              <a:spcBef>
+                <a:spcPts val="0"/>
+              </a:spcBef>
+              <a:spcAft>
+                <a:spcPts val="0"/>
+              </a:spcAft>
+            </a:pPr>
+            <a:r>
+              <a:rPr sz="1300" b="0" i="1">
+                <a:solidFill>
+                  <a:srgbClr val="818181"/>
+                </a:solidFill>
+                <a:latin typeface="Arial"/>
+              </a:rPr>
+              <a:t>High and low against the range: a narrow bar packs the fixed volume into little movement, a tall bar spreads it over a big one.</a:t>
+            </a:r>
+          </a:p>
+        </p:txBody>
+      </p:sp>
+      <p:sp>
+        <p:nvSpPr>
+          <p:cNvPr id="11" name="Rectangle 10"/>
           <p:cNvSpPr/>
           <p:nvPr/>
         </p:nvSpPr>
@@ -47201,7 +47336,7 @@
       </p:sp>
       <p:sp>
         <p:nvSpPr>
-          <p:cNvPr id="11" name="Rectangle 10"/>
+          <p:cNvPr id="12" name="Rectangle 11"/>
           <p:cNvSpPr/>
           <p:nvPr/>
         </p:nvSpPr>
@@ -47231,7 +47366,7 @@
       </p:sp>
       <p:sp>
         <p:nvSpPr>
-          <p:cNvPr id="12" name="TextBox 11"/>
+          <p:cNvPr id="13" name="TextBox 12"/>
           <p:cNvSpPr txBox="1"/>
           <p:nvPr/>
         </p:nvSpPr>
@@ -47320,7 +47455,7 @@
       </p:sp>
       <p:sp>
         <p:nvSpPr>
-          <p:cNvPr id="13" name="TextBox 12"/>
+          <p:cNvPr id="14" name="TextBox 13"/>
           <p:cNvSpPr txBox="1"/>
           <p:nvPr/>
         </p:nvSpPr>
@@ -47365,7 +47500,7 @@
       </p:sp>
       <p:sp>
         <p:nvSpPr>
-          <p:cNvPr id="14" name="TextBox 13"/>
+          <p:cNvPr id="15" name="TextBox 14"/>
           <p:cNvSpPr txBox="1"/>
           <p:nvPr/>
         </p:nvSpPr>
@@ -51495,7 +51630,7 @@
                 </a:solidFill>
                 <a:latin typeface="Arial"/>
               </a:rPr>
-              <a:t>Each is read for signals by eight standard methods. Only one, divergence, is used here.</a:t>
+              <a:t>Each is read by eight standard methods. Here: mostly divergence, plus oversold levels and trendlines on the indicator.</a:t>
             </a:r>
           </a:p>
         </p:txBody>
@@ -57845,7 +57980,7 @@
                 </a:solidFill>
                 <a:latin typeface="Arial"/>
               </a:rPr>
-              <a:t>The Chaikin oscillator gives an earlier sell, or bearish, signal than the CMF.</a:t>
+              <a:t>The sell, or bearish, signal: each breaks the rising line drawn under it. The Chaikin oscillator breaks first, the CMF later.</a:t>
             </a:r>
           </a:p>
           <a:p>
@@ -57880,8 +58015,8 @@
         </p:nvSpPr>
         <p:spPr>
           <a:xfrm>
-            <a:off x="777240" y="4416552"/>
-            <a:ext cx="82296" cy="1106423"/>
+            <a:off x="777240" y="4736592"/>
+            <a:ext cx="82296" cy="786384"/>
           </a:xfrm>
           <a:prstGeom prst="rect">
             <a:avLst/>
@@ -57910,8 +58045,8 @@
         </p:nvSpPr>
         <p:spPr>
           <a:xfrm>
-            <a:off x="1069848" y="4453128"/>
-            <a:ext cx="4645152" cy="1106423"/>
+            <a:off x="1069848" y="4773168"/>
+            <a:ext cx="4645152" cy="786384"/>
           </a:xfrm>
           <a:prstGeom prst="rect">
             <a:avLst/>
@@ -57942,7 +58077,7 @@
                 </a:solidFill>
                 <a:latin typeface="Arial"/>
               </a:rPr>
-              <a:t>Two related oscillators: one turns first, both agree at the bottom.</a:t>
+              <a:t>The Chaikin oscillator gives the earlier signal.</a:t>
             </a:r>
           </a:p>
         </p:txBody>

--- a/chapter-06/FIN1209-Chapter-06-Student-Edition.pptx
+++ b/chapter-06/FIN1209-Chapter-06-Student-Edition.pptx
@@ -25957,13 +25957,13 @@
               </a:spcAft>
             </a:pPr>
             <a:r>
-              <a:rPr sz="1800" b="0" i="0">
+              <a:rPr sz="1600" b="0" i="0">
                 <a:solidFill>
                   <a:srgbClr val="1A1A1A"/>
                 </a:solidFill>
                 <a:latin typeface="Arial"/>
               </a:rPr>
-              <a:t>The lookback period: a simple backtest may be needed to find the right filtering.</a:t>
+              <a:t>The lookback is how many bars the average covers. Short: hugs the bars closely, many signals, mostly false.</a:t>
             </a:r>
           </a:p>
           <a:p>
@@ -25979,13 +25979,13 @@
               </a:spcAft>
             </a:pPr>
             <a:r>
-              <a:rPr sz="1800" b="0" i="0">
+              <a:rPr sz="1600" b="0" i="0">
                 <a:solidFill>
                   <a:srgbClr val="1A1A1A"/>
                 </a:solidFill>
                 <a:latin typeface="Arial"/>
               </a:rPr>
-              <a:t>Some set it to the dominant trading cycle period, or half of it.</a:t>
+              <a:t>Long: slow and flat, few signals, and some turns missed. The right length sits in between.</a:t>
             </a:r>
           </a:p>
           <a:p>
@@ -26001,13 +26001,13 @@
               </a:spcAft>
             </a:pPr>
             <a:r>
-              <a:rPr sz="1800" b="0" i="0">
+              <a:rPr sz="1600" b="0" i="0">
                 <a:solidFill>
                   <a:srgbClr val="1A1A1A"/>
                 </a:solidFill>
                 <a:latin typeface="Arial"/>
               </a:rPr>
-              <a:t>Figure 6.20: spikes above the smoothed volume line, each at a top or a bottom.</a:t>
+              <a:t>Some set it to the dominant trading cycle period, or half of it; a simple backtest may be needed instead.</a:t>
             </a:r>
           </a:p>
         </p:txBody>
@@ -26020,8 +26020,8 @@
         </p:nvSpPr>
         <p:spPr>
           <a:xfrm>
-            <a:off x="777240" y="4389120"/>
-            <a:ext cx="82296" cy="725424"/>
+            <a:off x="777240" y="4709160"/>
+            <a:ext cx="82296" cy="405384"/>
           </a:xfrm>
           <a:prstGeom prst="rect">
             <a:avLst/>
@@ -26050,8 +26050,8 @@
         </p:nvSpPr>
         <p:spPr>
           <a:xfrm>
-            <a:off x="1069848" y="4425696"/>
-            <a:ext cx="4645152" cy="725424"/>
+            <a:off x="1069848" y="4745736"/>
+            <a:ext cx="4645152" cy="405384"/>
           </a:xfrm>
           <a:prstGeom prst="rect">
             <a:avLst/>
@@ -26076,7 +26076,7 @@
               </a:spcAft>
             </a:pPr>
             <a:r>
-              <a:rPr sz="1900" b="1" i="0">
+              <a:rPr sz="1700" b="1" i="0">
                 <a:solidFill>
                   <a:srgbClr val="1A1A1A"/>
                 </a:solidFill>
@@ -26127,7 +26127,7 @@
                 </a:solidFill>
                 <a:latin typeface="Arial"/>
               </a:rPr>
-              <a:t>Backtest: run a method on past prices. Cycle period: how long a swing takes. Both Chapter 5. Dominant: undefined; our reading, the cycle most visible on the chart.</a:t>
+              <a:t>Backtest: run a method on past prices. Cycle period: how long a swing takes. Both Chapter 5.</a:t>
             </a:r>
           </a:p>
         </p:txBody>
@@ -26629,7 +26629,7 @@
         <p:spPr>
           <a:xfrm>
             <a:off x="777240" y="2258568"/>
-            <a:ext cx="64008" cy="719328"/>
+            <a:ext cx="64008" cy="688848"/>
           </a:xfrm>
           <a:prstGeom prst="rect">
             <a:avLst/>
@@ -26659,7 +26659,7 @@
         <p:spPr>
           <a:xfrm>
             <a:off x="1051560" y="2212848"/>
-            <a:ext cx="5760720" cy="829056"/>
+            <a:ext cx="5760720" cy="798576"/>
           </a:xfrm>
           <a:prstGeom prst="rect">
             <a:avLst/>
@@ -26706,13 +26706,13 @@
               </a:spcAft>
             </a:pPr>
             <a:r>
-              <a:rPr sz="1700" b="1" i="0">
+              <a:rPr sz="1600" b="1" i="0">
                 <a:solidFill>
                   <a:srgbClr val="1A1A1A"/>
                 </a:solidFill>
                 <a:latin typeface="Arial"/>
               </a:rPr>
-              <a:t>A line two or three standard deviations above average volume: only surges that cross it count.</a:t>
+              <a:t>A rolling line: Upper = average + k x standard deviation, recomputed each bar from its last N bars.</a:t>
             </a:r>
           </a:p>
         </p:txBody>
@@ -26725,8 +26725,8 @@
         </p:nvSpPr>
         <p:spPr>
           <a:xfrm>
-            <a:off x="777240" y="3233927"/>
-            <a:ext cx="64008" cy="719328"/>
+            <a:off x="777240" y="3203447"/>
+            <a:ext cx="64008" cy="932688"/>
           </a:xfrm>
           <a:prstGeom prst="rect">
             <a:avLst/>
@@ -26755,8 +26755,8 @@
         </p:nvSpPr>
         <p:spPr>
           <a:xfrm>
-            <a:off x="1051560" y="3188207"/>
-            <a:ext cx="5760720" cy="829056"/>
+            <a:off x="1051560" y="3157728"/>
+            <a:ext cx="5760720" cy="1042415"/>
           </a:xfrm>
           <a:prstGeom prst="rect">
             <a:avLst/>
@@ -26803,13 +26803,13 @@
               </a:spcAft>
             </a:pPr>
             <a:r>
-              <a:rPr sz="1700" b="0" i="0">
+              <a:rPr sz="1600" b="0" i="0">
                 <a:solidFill>
                   <a:srgbClr val="1A1A1A"/>
                 </a:solidFill>
                 <a:latin typeface="Arial"/>
               </a:rPr>
-              <a:t>Our chart: the 20-bar average plus three standard deviations of those bars. Three bars cross it.</a:t>
+              <a:t>Worked, ours, N=5: volumes 8, 10, 12, 9, 11 million. Average 10, standard deviation 1.41. Upper = 10 + 3x1.41 = 14.2 million: 15 crosses, 12 does not.</a:t>
             </a:r>
           </a:p>
         </p:txBody>
@@ -26822,8 +26822,8 @@
         </p:nvSpPr>
         <p:spPr>
           <a:xfrm>
-            <a:off x="777240" y="4209287"/>
-            <a:ext cx="64008" cy="1237488"/>
+            <a:off x="777240" y="4392167"/>
+            <a:ext cx="64008" cy="1176528"/>
           </a:xfrm>
           <a:prstGeom prst="rect">
             <a:avLst/>
@@ -26852,8 +26852,8 @@
         </p:nvSpPr>
         <p:spPr>
           <a:xfrm>
-            <a:off x="1051560" y="4163567"/>
-            <a:ext cx="5760720" cy="1347216"/>
+            <a:off x="1051560" y="4346448"/>
+            <a:ext cx="5760720" cy="1286256"/>
           </a:xfrm>
           <a:prstGeom prst="rect">
             <a:avLst/>
@@ -26900,13 +26900,13 @@
               </a:spcAft>
             </a:pPr>
             <a:r>
-              <a:rPr sz="1700" b="0" i="0">
+              <a:rPr sz="1600" b="0" i="0">
                 <a:solidFill>
                   <a:srgbClr val="1A1A1A"/>
                 </a:solidFill>
                 <a:latin typeface="Arial"/>
               </a:rPr>
-              <a:t>A two- or three-standard deviation, or sigma, filter, also called a volatility filter, keeps only the most significant surges: a 2 or 3 standard deviation Bollinger Band on volume, upper band only.</a:t>
+              <a:t>A 2- or 3-sigma filter, also a volatility filter, keeps only the most significant surges: a Bollinger Band on volume, upper band only. The book does not say N or N-1, or whether the bar is in its own window.</a:t>
             </a:r>
           </a:p>
         </p:txBody>

--- a/chapter-06/FIN1209-Chapter-06-Student-Edition.pptx
+++ b/chapter-06/FIN1209-Chapter-06-Student-Edition.pptx
@@ -38789,7 +38789,7 @@
         <p:spPr>
           <a:xfrm>
             <a:off x="777240" y="2258568"/>
-            <a:ext cx="64008" cy="719328"/>
+            <a:ext cx="64008" cy="1115568"/>
           </a:xfrm>
           <a:prstGeom prst="rect">
             <a:avLst/>
@@ -38819,7 +38819,7 @@
         <p:spPr>
           <a:xfrm>
             <a:off x="1051560" y="2212848"/>
-            <a:ext cx="5760720" cy="829056"/>
+            <a:ext cx="5760720" cy="1225296"/>
           </a:xfrm>
           <a:prstGeom prst="rect">
             <a:avLst/>
@@ -38866,13 +38866,13 @@
               </a:spcAft>
             </a:pPr>
             <a:r>
-              <a:rPr sz="1700" b="1" i="0">
+              <a:rPr sz="1500" b="1" i="0">
                 <a:solidFill>
                   <a:srgbClr val="1A1A1A"/>
                 </a:solidFill>
                 <a:latin typeface="Arial"/>
               </a:rPr>
-              <a:t>By time: the usual bars, one a period. By price: sideways bars, one per price level.</a:t>
+              <a:t>A different split from the tick and the TRIN: not a breadth count, but one share count sliced two ways. By time: the usual bars, one a period. By price: sideways bars, one per price level.</a:t>
             </a:r>
           </a:p>
         </p:txBody>
@@ -38885,8 +38885,8 @@
         </p:nvSpPr>
         <p:spPr>
           <a:xfrm>
-            <a:off x="777240" y="3233927"/>
-            <a:ext cx="64008" cy="978408"/>
+            <a:off x="777240" y="3630168"/>
+            <a:ext cx="64008" cy="886968"/>
           </a:xfrm>
           <a:prstGeom prst="rect">
             <a:avLst/>
@@ -38915,8 +38915,8 @@
         </p:nvSpPr>
         <p:spPr>
           <a:xfrm>
-            <a:off x="1051560" y="3188207"/>
-            <a:ext cx="5760720" cy="1088136"/>
+            <a:off x="1051560" y="3584448"/>
+            <a:ext cx="5760720" cy="996696"/>
           </a:xfrm>
           <a:prstGeom prst="rect">
             <a:avLst/>
@@ -38963,7 +38963,7 @@
               </a:spcAft>
             </a:pPr>
             <a:r>
-              <a:rPr sz="1700" b="0" i="0">
+              <a:rPr sz="1500" b="0" i="0">
                 <a:solidFill>
                   <a:srgbClr val="1A1A1A"/>
                 </a:solidFill>
@@ -38982,8 +38982,8 @@
         </p:nvSpPr>
         <p:spPr>
           <a:xfrm>
-            <a:off x="777240" y="4468367"/>
-            <a:ext cx="64008" cy="1237488"/>
+            <a:off x="777240" y="4773168"/>
+            <a:ext cx="64008" cy="886968"/>
           </a:xfrm>
           <a:prstGeom prst="rect">
             <a:avLst/>
@@ -39012,8 +39012,8 @@
         </p:nvSpPr>
         <p:spPr>
           <a:xfrm>
-            <a:off x="1051560" y="4422647"/>
-            <a:ext cx="5760720" cy="1347216"/>
+            <a:off x="1051560" y="4727448"/>
+            <a:ext cx="5760720" cy="996696"/>
           </a:xfrm>
           <a:prstGeom prst="rect">
             <a:avLst/>
@@ -39060,7 +39060,7 @@
               </a:spcAft>
             </a:pPr>
             <a:r>
-              <a:rPr sz="1700" b="0" i="0">
+              <a:rPr sz="1500" b="0" i="0">
                 <a:solidFill>
                   <a:srgbClr val="1A1A1A"/>
                 </a:solidFill>

--- a/chapter-06/FIN1209-Chapter-06-Student-Edition.pptx
+++ b/chapter-06/FIN1209-Chapter-06-Student-Edition.pptx
@@ -30705,7 +30705,7 @@
                 </a:solidFill>
                 <a:latin typeface="Arial"/>
               </a:rPr>
-              <a:t>The three-sigma filter, run on the book's daily USDJPY chart.</a:t>
+              <a:t>Stepped line: the three-sigma filter, on daily USDJPY. The book marks three surges over it, arrows up to price.</a:t>
             </a:r>
           </a:p>
           <a:p>
@@ -30727,7 +30727,7 @@
                 </a:solidFill>
                 <a:latin typeface="Arial"/>
               </a:rPr>
-              <a:t>Each arrow runs from a bar crossing the stepped 3-sigma line up to price that day. Only three cross.</a:t>
+              <a:t>Figure 6.20, same market, marked six. Stricter, this line skips the April 2011 top, the highest price, that 6.20 caught.</a:t>
             </a:r>
           </a:p>
           <a:p>
@@ -30749,7 +30749,7 @@
                 </a:solidFill>
                 <a:latin typeface="Arial"/>
               </a:rPr>
-              <a:t>Figure 6.20, same market: many bars cross its smoothed average; the book marks six. This line is stricter.</a:t>
+              <a:t>The two lower lines are drawn and not named by the book; only the top one is the filter.</a:t>
             </a:r>
           </a:p>
         </p:txBody>
@@ -31065,7 +31065,7 @@
                 </a:solidFill>
                 <a:latin typeface="Arial"/>
               </a:rPr>
-              <a:t>Book p.189 and Figure 6.21. Ours: the counts of crossings and arrows, read off Figures 6.20 and 6.21.</a:t>
+              <a:t>Book p.189 and Figure 6.21. Ours: the counts of arrows and the April top, read off Figures 6.20 and 6.21.</a:t>
             </a:r>
           </a:p>
         </p:txBody>
@@ -31352,7 +31352,7 @@
                 </a:solidFill>
                 <a:latin typeface="Arial"/>
               </a:rPr>
-              <a:t>Two things the book leaves out: the N behind Figure 6.21's line, and how it chose Figure 6.20's six arrows.</a:t>
+              <a:t>Figure 6.21's line stays high for months after the March spike, far beyond our 20 bars. The book never gives its N.</a:t>
             </a:r>
           </a:p>
         </p:txBody>
@@ -31427,7 +31427,7 @@
                 </a:solidFill>
                 <a:latin typeface="Arial"/>
               </a:rPr>
-              <a:t>What to do: draw the 3-sigma line over the volume bars. A bar above it may mark a top or a bottom.</a:t>
+              <a:t>What to do: pick N as for the smoothed filter, then draw the 3-sigma line over the bars. A bar above it may mark a top or bottom.</a:t>
             </a:r>
           </a:p>
         </p:txBody>
@@ -32561,7 +32561,7 @@
                 </a:solidFill>
                 <a:latin typeface="Arial"/>
               </a:rPr>
-              <a:t>Ours, in millions: 1, 2, 3 came on 3.0, above our 2.5 threshold line. Six grey turns came on 1.0: dropped.</a:t>
+              <a:t>Ours, in millions: 1, 2, 3 came on 3.0, above our 2.5 line. Seven grey turns came on 1.0: dropped.</a:t>
             </a:r>
           </a:p>
         </p:txBody>
@@ -32804,7 +32804,7 @@
                 </a:solidFill>
                 <a:latin typeface="Arial"/>
               </a:rPr>
-              <a:t>Book p.189. Inflection point, trendline and channel: Chapter 5. The chart is ours, invented.</a:t>
+              <a:t>Book p.189. Inflection point: Chapter 5. The chart is ours, invented.</a:t>
             </a:r>
           </a:p>
         </p:txBody>
@@ -33016,104 +33016,104 @@
         <p:spPr>
           <a:xfrm>
             <a:off x="777240" y="1965960"/>
-            <a:ext cx="10637215" cy="3108960"/>
-          </a:xfrm>
-          <a:prstGeom prst="rect">
-            <a:avLst/>
-          </a:prstGeom>
-          <a:noFill/>
-        </p:spPr>
-        <p:txBody>
-          <a:bodyPr wrap="square" anchor="t" lIns="0" rIns="0" tIns="0" bIns="0">
-            <a:spAutoFit/>
-          </a:bodyPr>
-          <a:lstStyle/>
-          <a:p>
-            <a:pPr algn="l">
-              <a:lnSpc>
-                <a:spcPct val="118000"/>
-              </a:lnSpc>
-              <a:spcBef>
-                <a:spcPts val="0"/>
-              </a:spcBef>
-              <a:spcAft>
-                <a:spcPts val="1300"/>
-              </a:spcAft>
-            </a:pPr>
-            <a:r>
-              <a:rPr sz="2100" b="0" i="0">
+            <a:ext cx="5120640" cy="3108960"/>
+          </a:xfrm>
+          <a:prstGeom prst="rect">
+            <a:avLst/>
+          </a:prstGeom>
+          <a:noFill/>
+        </p:spPr>
+        <p:txBody>
+          <a:bodyPr wrap="square" anchor="t" lIns="0" rIns="0" tIns="0" bIns="0">
+            <a:spAutoFit/>
+          </a:bodyPr>
+          <a:lstStyle/>
+          <a:p>
+            <a:pPr algn="l">
+              <a:lnSpc>
+                <a:spcPct val="105000"/>
+              </a:lnSpc>
+              <a:spcBef>
+                <a:spcPts val="0"/>
+              </a:spcBef>
+              <a:spcAft>
+                <a:spcPts val="1100"/>
+              </a:spcAft>
+            </a:pPr>
+            <a:r>
+              <a:rPr sz="1800" b="0" i="0">
                 <a:solidFill>
                   <a:srgbClr val="1A1A1A"/>
                 </a:solidFill>
                 <a:latin typeface="Arial"/>
               </a:rPr>
-              <a:t>Step 1. Mark every peak and trough: the gold and grey dots, nine of them.</a:t>
-            </a:r>
-          </a:p>
-          <a:p>
-            <a:pPr algn="l">
-              <a:lnSpc>
-                <a:spcPct val="118000"/>
-              </a:lnSpc>
-              <a:spcBef>
-                <a:spcPts val="0"/>
-              </a:spcBef>
-              <a:spcAft>
-                <a:spcPts val="1300"/>
-              </a:spcAft>
-            </a:pPr>
-            <a:r>
-              <a:rPr sz="2100" b="0" i="0">
+              <a:t>Step 1. Mark every peak and trough.</a:t>
+            </a:r>
+          </a:p>
+          <a:p>
+            <a:pPr algn="l">
+              <a:lnSpc>
+                <a:spcPct val="105000"/>
+              </a:lnSpc>
+              <a:spcBef>
+                <a:spcPts val="0"/>
+              </a:spcBef>
+              <a:spcAft>
+                <a:spcPts val="1100"/>
+              </a:spcAft>
+            </a:pPr>
+            <a:r>
+              <a:rPr sz="1800" b="0" i="0">
                 <a:solidFill>
                   <a:srgbClr val="1A1A1A"/>
                 </a:solidFill>
                 <a:latin typeface="Arial"/>
               </a:rPr>
-              <a:t>Step 2. By eye, draw a threshold line only the heaviest volume reaches: ours 2.5 million, average 1.3. The book gives no number. Keep 1, 2, 3.</a:t>
-            </a:r>
-          </a:p>
-          <a:p>
-            <a:pPr algn="l">
-              <a:lnSpc>
-                <a:spcPct val="118000"/>
-              </a:lnSpc>
-              <a:spcBef>
-                <a:spcPts val="0"/>
-              </a:spcBef>
-              <a:spcAft>
-                <a:spcPts val="1300"/>
-              </a:spcAft>
-            </a:pPr>
-            <a:r>
-              <a:rPr sz="2100" b="0" i="0">
+              <a:t>Step 2. The book's rule: above average volume, 1.3 here. Its example draws a higher line by eye, and it never says which governs. Ours: 2.5. Only 1, 2, 3 reach it.</a:t>
+            </a:r>
+          </a:p>
+          <a:p>
+            <a:pPr algn="l">
+              <a:lnSpc>
+                <a:spcPct val="105000"/>
+              </a:lnSpc>
+              <a:spcBef>
+                <a:spcPts val="0"/>
+              </a:spcBef>
+              <a:spcAft>
+                <a:spcPts val="1100"/>
+              </a:spcAft>
+            </a:pPr>
+            <a:r>
+              <a:rPr sz="1800" b="0" i="0">
                 <a:solidFill>
                   <a:srgbClr val="1A1A1A"/>
                 </a:solidFill>
                 <a:latin typeface="Arial"/>
               </a:rPr>
-              <a:t>Step 3. Trendline through peaks 1 (bar 22, PHP 52.00) and 2 (bar 62, PHP 56.00): up PHP 4.00 in 40 bars, 0.10 a bar.</a:t>
-            </a:r>
-          </a:p>
-          <a:p>
-            <a:pPr algn="l">
-              <a:lnSpc>
-                <a:spcPct val="118000"/>
-              </a:lnSpc>
-              <a:spcBef>
-                <a:spcPts val="0"/>
-              </a:spcBef>
-              <a:spcAft>
-                <a:spcPts val="1300"/>
-              </a:spcAft>
-            </a:pPr>
-            <a:r>
-              <a:rPr sz="2100" b="0" i="0">
+              <a:t>Step 3. Join peaks 1 (bar 22, PHP 52.00) and 2 (bar 62, PHP 56.00): PHP 4.00 in 40 bars, 0.10 a bar.</a:t>
+            </a:r>
+          </a:p>
+          <a:p>
+            <a:pPr algn="l">
+              <a:lnSpc>
+                <a:spcPct val="105000"/>
+              </a:lnSpc>
+              <a:spcBef>
+                <a:spcPts val="0"/>
+              </a:spcBef>
+              <a:spcAft>
+                <a:spcPts val="1100"/>
+              </a:spcAft>
+            </a:pPr>
+            <a:r>
+              <a:rPr sz="1800" b="0" i="0">
                 <a:solidFill>
                   <a:srgbClr val="1A1A1A"/>
                 </a:solidFill>
                 <a:latin typeface="Arial"/>
               </a:rPr>
-              <a:t>Step 4. Through trough 3 (bar 44, PHP 49.00), a parallel at the same 0.10 a bar.</a:t>
+              <a:t>Step 4. The same slope through trough 3 (bar 44, PHP 49.00): the channel.</a:t>
             </a:r>
           </a:p>
         </p:txBody>
@@ -33126,17 +33126,19 @@
         </p:nvSpPr>
         <p:spPr>
           <a:xfrm>
-            <a:off x="777240" y="5211317"/>
-            <a:ext cx="82296" cy="467614"/>
+            <a:off x="6219291" y="1810512"/>
+            <a:ext cx="5193792" cy="3749039"/>
           </a:xfrm>
           <a:prstGeom prst="rect">
             <a:avLst/>
           </a:prstGeom>
           <a:solidFill>
-            <a:srgbClr val="F2A900"/>
+            <a:srgbClr val="FFFFFF"/>
           </a:solidFill>
-          <a:ln>
-            <a:noFill/>
+          <a:ln w="12700">
+            <a:solidFill>
+              <a:srgbClr val="D7E0D9"/>
+            </a:solidFill>
           </a:ln>
           <a:effectLst/>
         </p:spPr>
@@ -33148,54 +33150,78 @@
           </a:p>
         </p:txBody>
       </p:sp>
-      <p:sp>
-        <p:nvSpPr>
-          <p:cNvPr id="9" name="TextBox 8"/>
-          <p:cNvSpPr txBox="1"/>
-          <p:nvPr/>
-        </p:nvSpPr>
-        <p:spPr>
-          <a:xfrm>
-            <a:off x="1069848" y="5247893"/>
-            <a:ext cx="10344607" cy="467614"/>
-          </a:xfrm>
-          <a:prstGeom prst="rect">
-            <a:avLst/>
-          </a:prstGeom>
-          <a:noFill/>
-        </p:spPr>
-        <p:txBody>
-          <a:bodyPr wrap="square" anchor="t" lIns="0" rIns="0" tIns="0" bIns="0">
-            <a:spAutoFit/>
-          </a:bodyPr>
-          <a:lstStyle/>
-          <a:p>
-            <a:pPr algn="l">
-              <a:lnSpc>
-                <a:spcPct val="115000"/>
-              </a:lnSpc>
-              <a:spcBef>
-                <a:spcPts val="0"/>
-              </a:spcBef>
-              <a:spcAft>
-                <a:spcPts val="0"/>
-              </a:spcAft>
-            </a:pPr>
-            <a:r>
-              <a:rPr sz="2200" b="1" i="0">
-                <a:solidFill>
-                  <a:srgbClr val="1A1A1A"/>
-                </a:solidFill>
-                <a:latin typeface="Arial"/>
-              </a:rPr>
-              <a:t>The two parallels are the channel.</a:t>
-            </a:r>
-          </a:p>
-        </p:txBody>
-      </p:sp>
+      <p:pic>
+        <p:nvPicPr>
+          <p:cNvPr id="9" name="Picture 8" descr="chart-va.png"/>
+          <p:cNvPicPr>
+            <a:picLocks noChangeAspect="1"/>
+          </p:cNvPicPr>
+          <p:nvPr/>
+        </p:nvPicPr>
+        <p:blipFill>
+          <a:blip r:embed="rId2"/>
+          <a:stretch>
+            <a:fillRect/>
+          </a:stretch>
+        </p:blipFill>
+        <p:spPr>
+          <a:xfrm>
+            <a:off x="6338163" y="1929384"/>
+            <a:ext cx="4956048" cy="3511296"/>
+          </a:xfrm>
+          <a:prstGeom prst="rect">
+            <a:avLst/>
+          </a:prstGeom>
+        </p:spPr>
+      </p:pic>
       <p:sp>
         <p:nvSpPr>
           <p:cNvPr id="10" name="TextBox 9"/>
+          <p:cNvSpPr txBox="1"/>
+          <p:nvPr/>
+        </p:nvSpPr>
+        <p:spPr>
+          <a:xfrm>
+            <a:off x="6217919" y="5650991"/>
+            <a:ext cx="5196535" cy="274320"/>
+          </a:xfrm>
+          <a:prstGeom prst="rect">
+            <a:avLst/>
+          </a:prstGeom>
+          <a:noFill/>
+        </p:spPr>
+        <p:txBody>
+          <a:bodyPr wrap="square" anchor="t" lIns="0" rIns="0" tIns="0" bIns="0">
+            <a:spAutoFit/>
+          </a:bodyPr>
+          <a:lstStyle/>
+          <a:p>
+            <a:pPr algn="l">
+              <a:lnSpc>
+                <a:spcPct val="100000"/>
+              </a:lnSpc>
+              <a:spcBef>
+                <a:spcPts val="0"/>
+              </a:spcBef>
+              <a:spcAft>
+                <a:spcPts val="0"/>
+              </a:spcAft>
+            </a:pPr>
+            <a:r>
+              <a:rPr sz="900" b="0" i="0">
+                <a:solidFill>
+                  <a:srgbClr val="818181"/>
+                </a:solidFill>
+                <a:latin typeface="Arial"/>
+              </a:rPr>
+              <a:t>Chart VA - FIN1209 teaching chart, drawn for this course. Illustrative data, not a real instrument.</a:t>
+            </a:r>
+          </a:p>
+        </p:txBody>
+      </p:sp>
+      <p:sp>
+        <p:nvSpPr>
+          <p:cNvPr id="11" name="TextBox 10"/>
           <p:cNvSpPr txBox="1"/>
           <p:nvPr/>
         </p:nvSpPr>
@@ -33233,7 +33259,7 @@
                 </a:solidFill>
                 <a:latin typeface="Arial"/>
               </a:rPr>
-              <a:t>Ours: the steps and every number, invented, as on Chart V. The method is the book's, p.189.</a:t>
+              <a:t>Ours: the steps and every number, invented. The method and both rules for the threshold are the book's, p.189.</a:t>
             </a:r>
           </a:p>
         </p:txBody>
@@ -33498,7 +33524,7 @@
                 </a:solidFill>
                 <a:latin typeface="Arial"/>
               </a:rPr>
-              <a:t>A threshold drawn by visual inspection, so only the most significant peaks reach it; the oval rings them.</a:t>
+              <a:t>A threshold drawn by visual inspection, so only the most significant peaks reach it. The oval rings July to August.</a:t>
             </a:r>
           </a:p>
           <a:p>
@@ -33520,7 +33546,7 @@
                 </a:solidFill>
                 <a:latin typeface="Arial"/>
               </a:rPr>
-              <a:t>Arrows rise to Points 1, 2 and 3, the only turns used: trendline 1 to 2, parallel from 3.</a:t>
+              <a:t>Two arrows: under Points 1 and 3, days apart, and under 2. Trendline 1 to 2, parallel from 3.</a:t>
             </a:r>
           </a:p>
         </p:txBody>
@@ -34079,7 +34105,7 @@
                 </a:solidFill>
                 <a:latin typeface="Arial"/>
               </a:rPr>
-              <a:t>At both X's, ours and the book's, price turns up at the lower line: support. Ours: 49.00 + 28 bars x 0.10 = PHP 51.80.</a:t>
+              <a:t>Ours: X is bar 72, 28 bars after trough 3 at bar 44. The lower line is there at 49.00 + 28 x 0.10 = PHP 51.80; price touches it and turns up.</a:t>
             </a:r>
           </a:p>
           <a:p>
@@ -34101,7 +34127,7 @@
                 </a:solidFill>
                 <a:latin typeface="Arial"/>
               </a:rPr>
-              <a:t>Why only heavily traded turns? The book says only: the importance of significant inflection points.</a:t>
+              <a:t>Silver's April bars (labelled High tick volume level) and late September bars reach the line too; the channel uses only July to August, unexplained.</a:t>
             </a:r>
           </a:p>
           <a:p>
@@ -34123,7 +34149,7 @@
                 </a:solidFill>
                 <a:latin typeface="Arial"/>
               </a:rPr>
-              <a:t>Part 3's first rule fits: a barrier formed at a volume peak is the most reliable. That link is ours.</a:t>
+              <a:t>Chapter 5's uptrend line joined troughs; here the book joins two peaks and gives no reason. Either way, two parallels make the channel.</a:t>
             </a:r>
           </a:p>
         </p:txBody>
@@ -34198,7 +34224,7 @@
                 </a:solidFill>
                 <a:latin typeface="Arial"/>
               </a:rPr>
-              <a:t>Chapter 5's uptrend line joined troughs. Here the book joins two peaks, parallel through a trough, and gives no reason.</a:t>
+              <a:t>What to do: at the lower line, look for a short-term buy, as at silver's X. Falling through it violates the channel.</a:t>
             </a:r>
           </a:p>
         </p:txBody>
@@ -34243,7 +34269,7 @@
                 </a:solidFill>
                 <a:latin typeface="Arial"/>
               </a:rPr>
-              <a:t>Book pp.187, 189-190. Ours: the arithmetic at X and the link to Part 3's first slide.</a:t>
+              <a:t>Book pp.189-190 and Figure 6.22. Ours: the arithmetic at X, and what the figure's volume panel shows.</a:t>
             </a:r>
           </a:p>
         </p:txBody>
@@ -34486,7 +34512,7 @@
                 </a:solidFill>
                 <a:latin typeface="Arial"/>
               </a:rPr>
-              <a:t>Points numbered afresh. Trendline 1 to 2, parallel from 3: a large bearish candlestick, closing far below its open, breaks down through it.</a:t>
+              <a:t>Points numbered afresh. Ovals ring heavy volume under 1, under 3 and 2, under 5 and 6.</a:t>
             </a:r>
           </a:p>
           <a:p>
@@ -34508,7 +34534,7 @@
                 </a:solidFill>
                 <a:latin typeface="Arial"/>
               </a:rPr>
-              <a:t>A parallel from 4, carried back, touches the trough at X, January 2011. Found looking back; the book still calls it valid.</a:t>
+              <a:t>Trendline 1 to 2, parallel from 3: a large bearish candlestick, closing far below its open, breaks it.</a:t>
             </a:r>
           </a:p>
           <a:p>
@@ -34530,7 +34556,29 @@
                 </a:solidFill>
                 <a:latin typeface="Arial"/>
               </a:rPr>
-              <a:t>Parallels from 5 and 6: a new channel, resistance at its top, support at its bottom.</a:t>
+              <a:t>A parallel from 4, carried back, meets the trough at X, January 2011: valid, the book says, with no third touch (Chapter 5).</a:t>
+            </a:r>
+          </a:p>
+          <a:p>
+            <a:pPr algn="l">
+              <a:lnSpc>
+                <a:spcPct val="105000"/>
+              </a:lnSpc>
+              <a:spcBef>
+                <a:spcPts val="0"/>
+              </a:spcBef>
+              <a:spcAft>
+                <a:spcPts val="1100"/>
+              </a:spcAft>
+            </a:pPr>
+            <a:r>
+              <a:rPr sz="1700" b="0" i="0">
+                <a:solidFill>
+                  <a:srgbClr val="1A1A1A"/>
+                </a:solidFill>
+                <a:latin typeface="Arial"/>
+              </a:rPr>
+              <a:t>Parallels from 5 and 6: a new channel.</a:t>
             </a:r>
           </a:p>
         </p:txBody>
@@ -34543,7 +34591,7 @@
         </p:nvSpPr>
         <p:spPr>
           <a:xfrm>
-            <a:off x="777240" y="5109210"/>
+            <a:off x="777240" y="5273802"/>
             <a:ext cx="82296" cy="420623"/>
           </a:xfrm>
           <a:prstGeom prst="rect">
@@ -34573,7 +34621,7 @@
         </p:nvSpPr>
         <p:spPr>
           <a:xfrm>
-            <a:off x="1069848" y="5145786"/>
+            <a:off x="1069848" y="5310378"/>
             <a:ext cx="4828032" cy="420623"/>
           </a:xfrm>
           <a:prstGeom prst="rect">
@@ -34846,7 +34894,7 @@
                 </a:solidFill>
                 <a:latin typeface="Arial"/>
               </a:rPr>
-              <a:t>Book pp.189-190 and Figure 6.23. Candlestick: Chapter 3.</a:t>
+              <a:t>Book pp.189-190 and Figure 6.23. Candlestick and valid: Chapters 3 and 5.</a:t>
             </a:r>
           </a:p>
         </p:txBody>
@@ -35111,7 +35159,7 @@
                 </a:solidFill>
                 <a:latin typeface="Arial"/>
               </a:rPr>
-              <a:t>Its lesson: the importance of constructing chart patterns based on significant inflection points.</a:t>
+              <a:t>The 5 and 6 channel: resistance at its top, support at its bottom. The book's lesson: build patterns on significant inflection points.</a:t>
             </a:r>
           </a:p>
           <a:p>
